--- a/DATA5322_HW2_Skentzos_Poster.pptx
+++ b/DATA5322_HW2_Skentzos_Poster.pptx
@@ -666,7 +666,7 @@
         </p:nvSpPr>
         <p:spPr>
           <a:xfrm>
-            <a:off x="0" y="0"/>
+            <a:off x="148856" y="680484"/>
             <a:ext cx="32918400" cy="5029200"/>
           </a:xfrm>
           <a:prstGeom prst="rect">
@@ -781,7 +781,49 @@
               </a:rPr>
               <a:t>DATA 5322 Statistical Machine Learning II  ·  Seattle University  ·  Spring 2026</a:t>
             </a:r>
-            <a:endParaRPr lang="en-US" sz="2600" dirty="0"/>
+          </a:p>
+          <a:p>
+            <a:pPr algn="ctr"/>
+            <a:r>
+              <a:rPr lang="en-US" sz="2600" dirty="0">
+                <a:solidFill>
+                  <a:schemeClr val="bg1"/>
+                </a:solidFill>
+              </a:rPr>
+              <a:t>https://</a:t>
+            </a:r>
+            <a:r>
+              <a:rPr lang="en-US" sz="2600" dirty="0" err="1">
+                <a:solidFill>
+                  <a:schemeClr val="bg1"/>
+                </a:solidFill>
+              </a:rPr>
+              <a:t>github.com</a:t>
+            </a:r>
+            <a:r>
+              <a:rPr lang="en-US" sz="2600" dirty="0">
+                <a:solidFill>
+                  <a:schemeClr val="bg1"/>
+                </a:solidFill>
+              </a:rPr>
+              <a:t>/</a:t>
+            </a:r>
+            <a:r>
+              <a:rPr lang="en-US" sz="2600" dirty="0" err="1">
+                <a:solidFill>
+                  <a:schemeClr val="bg1"/>
+                </a:solidFill>
+              </a:rPr>
+              <a:t>gpskentzos</a:t>
+            </a:r>
+            <a:r>
+              <a:rPr lang="en-US" sz="2600" dirty="0">
+                <a:solidFill>
+                  <a:schemeClr val="bg1"/>
+                </a:solidFill>
+              </a:rPr>
+              <a:t>/DATA5322-PredictingDiabetesDiagnosis</a:t>
+            </a:r>
           </a:p>
         </p:txBody>
       </p:sp>

--- a/DATA5322_HW2_Skentzos_Poster.pptx
+++ b/DATA5322_HW2_Skentzos_Poster.pptx
@@ -995,7 +995,7 @@
         <p:spPr>
           <a:xfrm>
             <a:off x="548640" y="6016752"/>
-            <a:ext cx="9875520" cy="4937760"/>
+            <a:ext cx="9875520" cy="6491224"/>
           </a:xfrm>
           <a:prstGeom prst="rect">
             <a:avLst/>
@@ -1008,7 +1008,7 @@
           <a:lstStyle/>
           <a:p>
             <a:r>
-              <a:rPr lang="en-US" sz="2000" dirty="0"/>
+              <a:rPr lang="en-US" sz="2400" dirty="0"/>
               <a:t>I chose this problem because diabetes risk is influenced by both biological and behavioral factors, making it a good candidate for exploring classification models like SVM.</a:t>
             </a:r>
           </a:p>
@@ -1195,7 +1195,7 @@
         </p:nvSpPr>
         <p:spPr>
           <a:xfrm>
-            <a:off x="548640" y="11091672"/>
+            <a:off x="548640" y="12336272"/>
             <a:ext cx="9875520" cy="530352"/>
           </a:xfrm>
           <a:prstGeom prst="rect">
@@ -1227,7 +1227,7 @@
         </p:nvSpPr>
         <p:spPr>
           <a:xfrm>
-            <a:off x="685800" y="11091672"/>
+            <a:off x="685800" y="12342994"/>
             <a:ext cx="9601200" cy="530352"/>
           </a:xfrm>
           <a:prstGeom prst="rect">
@@ -1266,7 +1266,7 @@
         </p:nvSpPr>
         <p:spPr>
           <a:xfrm>
-            <a:off x="548640" y="11713464"/>
+            <a:off x="548640" y="12958064"/>
             <a:ext cx="9875520" cy="8412480"/>
           </a:xfrm>
           <a:prstGeom prst="rect">
@@ -1639,7 +1639,7 @@
         </p:blipFill>
         <p:spPr>
           <a:xfrm>
-            <a:off x="548640" y="20308824"/>
+            <a:off x="548640" y="19597624"/>
             <a:ext cx="9875520" cy="4572000"/>
           </a:xfrm>
           <a:prstGeom prst="rect">
@@ -1655,7 +1655,7 @@
         </p:nvSpPr>
         <p:spPr>
           <a:xfrm>
-            <a:off x="548640" y="24972264"/>
+            <a:off x="548640" y="24286464"/>
             <a:ext cx="9875520" cy="548640"/>
           </a:xfrm>
           <a:prstGeom prst="rect">
@@ -1694,7 +1694,7 @@
         </p:nvSpPr>
         <p:spPr>
           <a:xfrm>
-            <a:off x="548640" y="25703784"/>
+            <a:off x="548640" y="25525984"/>
             <a:ext cx="9875520" cy="530352"/>
           </a:xfrm>
           <a:prstGeom prst="rect">
@@ -1726,7 +1726,7 @@
         </p:nvSpPr>
         <p:spPr>
           <a:xfrm>
-            <a:off x="685800" y="25703784"/>
+            <a:off x="685800" y="25500584"/>
             <a:ext cx="9601200" cy="530352"/>
           </a:xfrm>
           <a:prstGeom prst="rect">
@@ -1765,7 +1765,7 @@
         </p:nvSpPr>
         <p:spPr>
           <a:xfrm>
-            <a:off x="548640" y="26325576"/>
+            <a:off x="548640" y="26376376"/>
             <a:ext cx="9875520" cy="7315200"/>
           </a:xfrm>
           <a:prstGeom prst="rect">
@@ -4812,7 +4812,7 @@
         </p:nvSpPr>
         <p:spPr>
           <a:xfrm>
-            <a:off x="21396960" y="33238440"/>
+            <a:off x="21396960" y="33873440"/>
             <a:ext cx="9875520" cy="530352"/>
           </a:xfrm>
           <a:prstGeom prst="rect">
@@ -4844,7 +4844,7 @@
         </p:nvSpPr>
         <p:spPr>
           <a:xfrm>
-            <a:off x="21534120" y="33238440"/>
+            <a:off x="21534120" y="33873440"/>
             <a:ext cx="9601200" cy="530352"/>
           </a:xfrm>
           <a:prstGeom prst="rect">
@@ -4883,7 +4883,7 @@
         </p:nvSpPr>
         <p:spPr>
           <a:xfrm>
-            <a:off x="21396960" y="33860232"/>
+            <a:off x="21396960" y="34495232"/>
             <a:ext cx="9875520" cy="6391656"/>
           </a:xfrm>
           <a:prstGeom prst="rect">
@@ -4989,13 +4989,8 @@
             </a:pPr>
             <a:r>
               <a:rPr lang="en-US" sz="2400" dirty="0"/>
-              <a:t>Limitations</a:t>
-            </a:r>
-            <a:r>
-              <a:rPr lang="en-US" sz="2400"/>
-              <a:t>: </a:t>
-            </a:r>
-            <a:endParaRPr lang="en-US" sz="2400" dirty="0"/>
+              <a:t>Limitations: </a:t>
+            </a:r>
           </a:p>
           <a:p>
             <a:pPr marL="342900" indent="-342900" algn="l">
